--- a/data/Project Presentation.pptx
+++ b/data/Project Presentation.pptx
@@ -211,7 +211,7 @@
           <a:p>
             <a:fld id="{68E98696-75F9-40E3-8568-A53F1E8D9C90}" type="datetimeFigureOut">
               <a:rPr lang="en-US" smtClean="0"/>
-              <a:t>11/11/2025</a:t>
+              <a:t>11/12/2025</a:t>
             </a:fld>
             <a:endParaRPr lang="en-US"/>
           </a:p>
@@ -2163,7 +2163,7 @@
           <a:p>
             <a:fld id="{49C6D569-90E7-4797-AB93-B35AA207B764}" type="datetimeFigureOut">
               <a:rPr lang="en-US" smtClean="0"/>
-              <a:t>11/11/2025</a:t>
+              <a:t>11/12/2025</a:t>
             </a:fld>
             <a:endParaRPr lang="en-US"/>
           </a:p>
@@ -2361,7 +2361,7 @@
           <a:p>
             <a:fld id="{49C6D569-90E7-4797-AB93-B35AA207B764}" type="datetimeFigureOut">
               <a:rPr lang="en-US" smtClean="0"/>
-              <a:t>11/11/2025</a:t>
+              <a:t>11/12/2025</a:t>
             </a:fld>
             <a:endParaRPr lang="en-US"/>
           </a:p>
@@ -2569,7 +2569,7 @@
           <a:p>
             <a:fld id="{49C6D569-90E7-4797-AB93-B35AA207B764}" type="datetimeFigureOut">
               <a:rPr lang="en-US" smtClean="0"/>
-              <a:t>11/11/2025</a:t>
+              <a:t>11/12/2025</a:t>
             </a:fld>
             <a:endParaRPr lang="en-US"/>
           </a:p>
@@ -2767,7 +2767,7 @@
           <a:p>
             <a:fld id="{49C6D569-90E7-4797-AB93-B35AA207B764}" type="datetimeFigureOut">
               <a:rPr lang="en-US" smtClean="0"/>
-              <a:t>11/11/2025</a:t>
+              <a:t>11/12/2025</a:t>
             </a:fld>
             <a:endParaRPr lang="en-US"/>
           </a:p>
@@ -3042,7 +3042,7 @@
           <a:p>
             <a:fld id="{49C6D569-90E7-4797-AB93-B35AA207B764}" type="datetimeFigureOut">
               <a:rPr lang="en-US" smtClean="0"/>
-              <a:t>11/11/2025</a:t>
+              <a:t>11/12/2025</a:t>
             </a:fld>
             <a:endParaRPr lang="en-US"/>
           </a:p>
@@ -3307,7 +3307,7 @@
           <a:p>
             <a:fld id="{49C6D569-90E7-4797-AB93-B35AA207B764}" type="datetimeFigureOut">
               <a:rPr lang="en-US" smtClean="0"/>
-              <a:t>11/11/2025</a:t>
+              <a:t>11/12/2025</a:t>
             </a:fld>
             <a:endParaRPr lang="en-US"/>
           </a:p>
@@ -3719,7 +3719,7 @@
           <a:p>
             <a:fld id="{49C6D569-90E7-4797-AB93-B35AA207B764}" type="datetimeFigureOut">
               <a:rPr lang="en-US" smtClean="0"/>
-              <a:t>11/11/2025</a:t>
+              <a:t>11/12/2025</a:t>
             </a:fld>
             <a:endParaRPr lang="en-US"/>
           </a:p>
@@ -3860,7 +3860,7 @@
           <a:p>
             <a:fld id="{49C6D569-90E7-4797-AB93-B35AA207B764}" type="datetimeFigureOut">
               <a:rPr lang="en-US" smtClean="0"/>
-              <a:t>11/11/2025</a:t>
+              <a:t>11/12/2025</a:t>
             </a:fld>
             <a:endParaRPr lang="en-US"/>
           </a:p>
@@ -3973,7 +3973,7 @@
           <a:p>
             <a:fld id="{49C6D569-90E7-4797-AB93-B35AA207B764}" type="datetimeFigureOut">
               <a:rPr lang="en-US" smtClean="0"/>
-              <a:t>11/11/2025</a:t>
+              <a:t>11/12/2025</a:t>
             </a:fld>
             <a:endParaRPr lang="en-US"/>
           </a:p>
@@ -4284,7 +4284,7 @@
           <a:p>
             <a:fld id="{49C6D569-90E7-4797-AB93-B35AA207B764}" type="datetimeFigureOut">
               <a:rPr lang="en-US" smtClean="0"/>
-              <a:t>11/11/2025</a:t>
+              <a:t>11/12/2025</a:t>
             </a:fld>
             <a:endParaRPr lang="en-US"/>
           </a:p>
@@ -4572,7 +4572,7 @@
           <a:p>
             <a:fld id="{49C6D569-90E7-4797-AB93-B35AA207B764}" type="datetimeFigureOut">
               <a:rPr lang="en-US" smtClean="0"/>
-              <a:t>11/11/2025</a:t>
+              <a:t>11/12/2025</a:t>
             </a:fld>
             <a:endParaRPr lang="en-US"/>
           </a:p>
@@ -4813,7 +4813,7 @@
           <a:p>
             <a:fld id="{49C6D569-90E7-4797-AB93-B35AA207B764}" type="datetimeFigureOut">
               <a:rPr lang="en-US" smtClean="0"/>
-              <a:t>11/11/2025</a:t>
+              <a:t>11/12/2025</a:t>
             </a:fld>
             <a:endParaRPr lang="en-US"/>
           </a:p>
@@ -13743,7 +13743,7 @@
         <p:spPr>
           <a:xfrm>
             <a:off x="847320" y="1906177"/>
-            <a:ext cx="6645299" cy="3539430"/>
+            <a:ext cx="6645299" cy="3046988"/>
           </a:xfrm>
           <a:prstGeom prst="rect">
             <a:avLst/>
@@ -13795,25 +13795,12 @@
               <a:buChar char="•"/>
             </a:pPr>
             <a:r>
-              <a:rPr lang="en-US" sz="1600" dirty="0"/>
-              <a:t>2020: 785 new track, including by 379 new artists</a:t>
+              <a:rPr lang="en-US" sz="1600"/>
+              <a:t>10692</a:t>
             </a:r>
-          </a:p>
-          <a:p>
-            <a:pPr marL="285750" indent="-285750">
-              <a:buFont typeface="Arial" panose="020B0604020202020204" pitchFamily="34" charset="0"/>
-              <a:buChar char="•"/>
-            </a:pPr>
-            <a:endParaRPr lang="en-US" sz="1600" dirty="0"/>
-          </a:p>
-          <a:p>
-            <a:pPr marL="285750" indent="-285750">
-              <a:buFont typeface="Arial" panose="020B0604020202020204" pitchFamily="34" charset="0"/>
-              <a:buChar char="•"/>
-            </a:pPr>
             <a:r>
               <a:rPr lang="en-US" sz="1600" dirty="0"/>
-              <a:t>10692	Artists . Travor Danial most popular, Martin Garrix with most tracks</a:t>
+              <a:t>	Artists . Travor Danial most popular, Martin Garrix with most tracks</a:t>
             </a:r>
           </a:p>
           <a:p>
@@ -13887,8 +13874,8 @@
         </p:nvSpPr>
         <p:spPr>
           <a:xfrm>
-            <a:off x="8675124" y="5125496"/>
-            <a:ext cx="2223984" cy="369332"/>
+            <a:off x="8326877" y="5125496"/>
+            <a:ext cx="3200400" cy="369332"/>
           </a:xfrm>
           <a:prstGeom prst="rect">
             <a:avLst/>
@@ -13903,7 +13890,7 @@
           <a:p>
             <a:r>
               <a:rPr lang="en-US" dirty="0"/>
-              <a:t>And the winner is…. </a:t>
+              <a:t>And the most popular track is…. </a:t>
             </a:r>
           </a:p>
         </p:txBody>
@@ -13933,7 +13920,7 @@
         </p:blipFill>
         <p:spPr>
           <a:xfrm>
-            <a:off x="7750342" y="4193121"/>
+            <a:off x="7620740" y="3975619"/>
             <a:ext cx="4073547" cy="2299754"/>
           </a:xfrm>
           <a:prstGeom prst="rect">
@@ -28209,75 +28196,6 @@
           </a:p>
         </p:txBody>
       </p:sp>
-      <p:sp>
-        <p:nvSpPr>
-          <p:cNvPr id="14" name="Rectangle 1">
-            <a:extLst>
-              <a:ext uri="{FF2B5EF4-FFF2-40B4-BE49-F238E27FC236}">
-                <a16:creationId xmlns:a16="http://schemas.microsoft.com/office/drawing/2014/main" id="{A79A9831-53BF-9E70-4A8F-21DC1AA0F59C}"/>
-              </a:ext>
-            </a:extLst>
-          </p:cNvPr>
-          <p:cNvSpPr>
-            <a:spLocks noChangeArrowheads="1"/>
-          </p:cNvSpPr>
-          <p:nvPr/>
-        </p:nvSpPr>
-        <p:spPr bwMode="auto">
-          <a:xfrm>
-            <a:off x="546370" y="854955"/>
-            <a:ext cx="12192000" cy="0"/>
-          </a:xfrm>
-          <a:prstGeom prst="rect">
-            <a:avLst/>
-          </a:prstGeom>
-          <a:noFill/>
-          <a:ln>
-            <a:noFill/>
-          </a:ln>
-          <a:effectLst/>
-          <a:extLst>
-            <a:ext uri="{909E8E84-426E-40DD-AFC4-6F175D3DCCD1}">
-              <a14:hiddenFill xmlns:a14="http://schemas.microsoft.com/office/drawing/2010/main">
-                <a:solidFill>
-                  <a:schemeClr val="accent1"/>
-                </a:solidFill>
-              </a14:hiddenFill>
-            </a:ext>
-            <a:ext uri="{91240B29-F687-4F45-9708-019B960494DF}">
-              <a14:hiddenLine xmlns:a14="http://schemas.microsoft.com/office/drawing/2010/main" w="9525">
-                <a:solidFill>
-                  <a:schemeClr val="tx1"/>
-                </a:solidFill>
-                <a:miter lim="800000"/>
-                <a:headEnd/>
-                <a:tailEnd/>
-              </a14:hiddenLine>
-            </a:ext>
-            <a:ext uri="{AF507438-7753-43E0-B8FC-AC1667EBCBE1}">
-              <a14:hiddenEffects xmlns:a14="http://schemas.microsoft.com/office/drawing/2010/main">
-                <a:effectLst>
-                  <a:outerShdw dist="35921" dir="2700000" algn="ctr" rotWithShape="0">
-                    <a:schemeClr val="bg2"/>
-                  </a:outerShdw>
-                </a:effectLst>
-              </a14:hiddenEffects>
-            </a:ext>
-          </a:extLst>
-        </p:spPr>
-        <p:txBody>
-          <a:bodyPr vert="horz" wrap="none" lIns="91440" tIns="45720" rIns="91440" bIns="25392" numCol="1" anchor="ctr" anchorCtr="0" compatLnSpc="1">
-            <a:prstTxWarp prst="textNoShape">
-              <a:avLst/>
-            </a:prstTxWarp>
-            <a:spAutoFit/>
-          </a:bodyPr>
-          <a:lstStyle/>
-          <a:p>
-            <a:endParaRPr lang="en-US"/>
-          </a:p>
-        </p:txBody>
-      </p:sp>
       <p:graphicFrame>
         <p:nvGraphicFramePr>
           <p:cNvPr id="19" name="Table 18">
@@ -35031,10 +34949,9 @@
           <a:lstStyle/>
           <a:p>
             <a:r>
-              <a:rPr lang="en-US" sz="3200"/>
+              <a:rPr lang="en-US" sz="3200" dirty="0"/>
               <a:t>Feature selection</a:t>
             </a:r>
-            <a:endParaRPr lang="en-US" sz="3200" dirty="0"/>
           </a:p>
         </p:txBody>
       </p:sp>
@@ -35113,9 +35030,9 @@
           <p:nvPr/>
         </p:nvCxnSpPr>
         <p:spPr>
-          <a:xfrm flipV="1">
-            <a:off x="6859657" y="2242391"/>
-            <a:ext cx="4085151" cy="224584"/>
+          <a:xfrm>
+            <a:off x="6859657" y="2466975"/>
+            <a:ext cx="4083960" cy="0"/>
           </a:xfrm>
           <a:prstGeom prst="straightConnector1">
             <a:avLst/>
@@ -35201,9 +35118,9 @@
           <p:nvPr/>
         </p:nvCxnSpPr>
         <p:spPr>
-          <a:xfrm flipV="1">
-            <a:off x="6859657" y="2090057"/>
-            <a:ext cx="2685559" cy="152334"/>
+          <a:xfrm>
+            <a:off x="6859657" y="2242391"/>
+            <a:ext cx="2683177" cy="0"/>
           </a:xfrm>
           <a:prstGeom prst="straightConnector1">
             <a:avLst/>
@@ -35527,6 +35444,150 @@
           </a:fontRef>
         </p:style>
       </p:cxnSp>
+      <p:sp>
+        <p:nvSpPr>
+          <p:cNvPr id="14" name="Rectangle 1">
+            <a:extLst>
+              <a:ext uri="{FF2B5EF4-FFF2-40B4-BE49-F238E27FC236}">
+                <a16:creationId xmlns:a16="http://schemas.microsoft.com/office/drawing/2014/main" id="{A79A9831-53BF-9E70-4A8F-21DC1AA0F59C}"/>
+              </a:ext>
+            </a:extLst>
+          </p:cNvPr>
+          <p:cNvSpPr>
+            <a:spLocks noChangeArrowheads="1"/>
+          </p:cNvSpPr>
+          <p:nvPr/>
+        </p:nvSpPr>
+        <p:spPr bwMode="auto">
+          <a:xfrm>
+            <a:off x="9180692" y="1909520"/>
+            <a:ext cx="859531" cy="287250"/>
+          </a:xfrm>
+          <a:prstGeom prst="rect">
+            <a:avLst/>
+          </a:prstGeom>
+          <a:noFill/>
+          <a:ln>
+            <a:noFill/>
+          </a:ln>
+          <a:effectLst/>
+          <a:extLst>
+            <a:ext uri="{909E8E84-426E-40DD-AFC4-6F175D3DCCD1}">
+              <a14:hiddenFill xmlns:a14="http://schemas.microsoft.com/office/drawing/2010/main">
+                <a:solidFill>
+                  <a:schemeClr val="accent1"/>
+                </a:solidFill>
+              </a14:hiddenFill>
+            </a:ext>
+            <a:ext uri="{91240B29-F687-4F45-9708-019B960494DF}">
+              <a14:hiddenLine xmlns:a14="http://schemas.microsoft.com/office/drawing/2010/main" w="9525">
+                <a:solidFill>
+                  <a:schemeClr val="tx1"/>
+                </a:solidFill>
+                <a:miter lim="800000"/>
+                <a:headEnd/>
+                <a:tailEnd/>
+              </a14:hiddenLine>
+            </a:ext>
+            <a:ext uri="{AF507438-7753-43E0-B8FC-AC1667EBCBE1}">
+              <a14:hiddenEffects xmlns:a14="http://schemas.microsoft.com/office/drawing/2010/main">
+                <a:effectLst>
+                  <a:outerShdw dist="35921" dir="2700000" algn="ctr" rotWithShape="0">
+                    <a:schemeClr val="bg2"/>
+                  </a:outerShdw>
+                </a:effectLst>
+              </a14:hiddenEffects>
+            </a:ext>
+          </a:extLst>
+        </p:spPr>
+        <p:txBody>
+          <a:bodyPr vert="horz" wrap="none" lIns="91440" tIns="45720" rIns="91440" bIns="25392" numCol="1" anchor="ctr" anchorCtr="0" compatLnSpc="1">
+            <a:prstTxWarp prst="textNoShape">
+              <a:avLst/>
+            </a:prstTxWarp>
+            <a:spAutoFit/>
+          </a:bodyPr>
+          <a:lstStyle/>
+          <a:p>
+            <a:r>
+              <a:rPr lang="en-US" sz="1400" dirty="0"/>
+              <a:t>Corr 0.97</a:t>
+            </a:r>
+          </a:p>
+        </p:txBody>
+      </p:sp>
+      <p:sp>
+        <p:nvSpPr>
+          <p:cNvPr id="11" name="Rectangle 1">
+            <a:extLst>
+              <a:ext uri="{FF2B5EF4-FFF2-40B4-BE49-F238E27FC236}">
+                <a16:creationId xmlns:a16="http://schemas.microsoft.com/office/drawing/2014/main" id="{54AACD19-EF30-7146-B363-9A2D1AD96403}"/>
+              </a:ext>
+            </a:extLst>
+          </p:cNvPr>
+          <p:cNvSpPr>
+            <a:spLocks noChangeArrowheads="1"/>
+          </p:cNvSpPr>
+          <p:nvPr/>
+        </p:nvSpPr>
+        <p:spPr bwMode="auto">
+          <a:xfrm>
+            <a:off x="10715625" y="1933927"/>
+            <a:ext cx="859531" cy="287250"/>
+          </a:xfrm>
+          <a:prstGeom prst="rect">
+            <a:avLst/>
+          </a:prstGeom>
+          <a:noFill/>
+          <a:ln>
+            <a:noFill/>
+          </a:ln>
+          <a:effectLst/>
+          <a:extLst>
+            <a:ext uri="{909E8E84-426E-40DD-AFC4-6F175D3DCCD1}">
+              <a14:hiddenFill xmlns:a14="http://schemas.microsoft.com/office/drawing/2010/main">
+                <a:solidFill>
+                  <a:schemeClr val="accent1"/>
+                </a:solidFill>
+              </a14:hiddenFill>
+            </a:ext>
+            <a:ext uri="{91240B29-F687-4F45-9708-019B960494DF}">
+              <a14:hiddenLine xmlns:a14="http://schemas.microsoft.com/office/drawing/2010/main" w="9525">
+                <a:solidFill>
+                  <a:schemeClr val="tx1"/>
+                </a:solidFill>
+                <a:miter lim="800000"/>
+                <a:headEnd/>
+                <a:tailEnd/>
+              </a14:hiddenLine>
+            </a:ext>
+            <a:ext uri="{AF507438-7753-43E0-B8FC-AC1667EBCBE1}">
+              <a14:hiddenEffects xmlns:a14="http://schemas.microsoft.com/office/drawing/2010/main">
+                <a:effectLst>
+                  <a:outerShdw dist="35921" dir="2700000" algn="ctr" rotWithShape="0">
+                    <a:schemeClr val="bg2"/>
+                  </a:outerShdw>
+                </a:effectLst>
+              </a14:hiddenEffects>
+            </a:ext>
+          </a:extLst>
+        </p:spPr>
+        <p:txBody>
+          <a:bodyPr vert="horz" wrap="none" lIns="91440" tIns="45720" rIns="91440" bIns="25392" numCol="1" anchor="ctr" anchorCtr="0" compatLnSpc="1">
+            <a:prstTxWarp prst="textNoShape">
+              <a:avLst/>
+            </a:prstTxWarp>
+            <a:spAutoFit/>
+          </a:bodyPr>
+          <a:lstStyle/>
+          <a:p>
+            <a:r>
+              <a:rPr lang="en-US" sz="1400" dirty="0"/>
+              <a:t>Corr 0.74</a:t>
+            </a:r>
+          </a:p>
+        </p:txBody>
+      </p:sp>
     </p:spTree>
     <p:extLst>
       <p:ext uri="{BB962C8B-B14F-4D97-AF65-F5344CB8AC3E}">
@@ -35854,6 +35915,60 @@
                                   </p:childTnLst>
                                 </p:cTn>
                               </p:par>
+                              <p:par>
+                                <p:cTn id="27" presetID="1" presetClass="entr" presetSubtype="0" fill="hold" grpId="0" nodeType="withEffect">
+                                  <p:stCondLst>
+                                    <p:cond delay="0"/>
+                                  </p:stCondLst>
+                                  <p:childTnLst>
+                                    <p:set>
+                                      <p:cBhvr>
+                                        <p:cTn id="28" dur="1" fill="hold">
+                                          <p:stCondLst>
+                                            <p:cond delay="0"/>
+                                          </p:stCondLst>
+                                        </p:cTn>
+                                        <p:tgtEl>
+                                          <p:spTgt spid="14"/>
+                                        </p:tgtEl>
+                                        <p:attrNameLst>
+                                          <p:attrName>style.visibility</p:attrName>
+                                        </p:attrNameLst>
+                                      </p:cBhvr>
+                                      <p:to>
+                                        <p:strVal val="visible"/>
+                                      </p:to>
+                                    </p:set>
+                                  </p:childTnLst>
+                                </p:cTn>
+                              </p:par>
+                              <p:par>
+                                <p:cTn id="29" presetID="1" presetClass="entr" presetSubtype="0" fill="hold" grpId="0" nodeType="withEffect">
+                                  <p:stCondLst>
+                                    <p:cond delay="0"/>
+                                  </p:stCondLst>
+                                  <p:childTnLst>
+                                    <p:set>
+                                      <p:cBhvr>
+                                        <p:cTn id="30" dur="1" fill="hold">
+                                          <p:stCondLst>
+                                            <p:cond delay="0"/>
+                                          </p:stCondLst>
+                                        </p:cTn>
+                                        <p:tgtEl>
+                                          <p:spTgt spid="11"/>
+                                        </p:tgtEl>
+                                        <p:attrNameLst>
+                                          <p:attrName>style.visibility</p:attrName>
+                                        </p:attrNameLst>
+                                      </p:cBhvr>
+                                      <p:to>
+                                        <p:strVal val="visible"/>
+                                      </p:to>
+                                    </p:set>
+                                  </p:childTnLst>
+                                </p:cTn>
+                              </p:par>
                             </p:childTnLst>
                           </p:cTn>
                         </p:par>
@@ -35884,6 +35999,8 @@
     <p:bldLst>
       <p:bldP spid="16" grpId="0"/>
       <p:bldP spid="26" grpId="0" animBg="1"/>
+      <p:bldP spid="14" grpId="0"/>
+      <p:bldP spid="11" grpId="0"/>
     </p:bldLst>
   </p:timing>
 </p:sld>
